--- a/MLOps/37 - Prometheus, метрики/Presentation/37 Prometheus.pptx
+++ b/MLOps/37 - Prometheus, метрики/Presentation/37 Prometheus.pptx
@@ -43,18 +43,11 @@
   <p:notesSz cx="6858000" cy="9144000"/>
   <p:embeddedFontLst>
     <p:embeddedFont>
-      <p:font typeface="AkayaTelivigala" panose="020F0502020204030204" pitchFamily="34" charset="0"/>
+      <p:font typeface="Roboto" panose="02000000000000000000" pitchFamily="2" charset="0"/>
       <p:regular r:id="rId33"/>
       <p:bold r:id="rId34"/>
       <p:italic r:id="rId35"/>
       <p:boldItalic r:id="rId36"/>
-    </p:embeddedFont>
-    <p:embeddedFont>
-      <p:font typeface="Roboto" panose="02000000000000000000" pitchFamily="2" charset="0"/>
-      <p:regular r:id="rId37"/>
-      <p:bold r:id="rId38"/>
-      <p:italic r:id="rId39"/>
-      <p:boldItalic r:id="rId40"/>
     </p:embeddedFont>
   </p:embeddedFontLst>
   <p:defaultTextStyle>
@@ -23118,7 +23111,7 @@
 </file>
 
 <file path=ppt/slides/slide18.xml><?xml version="1.0" encoding="utf-8"?>
-<p:sld xmlns:a="http://schemas.openxmlformats.org/drawingml/2006/main" xmlns:r="http://schemas.openxmlformats.org/officeDocument/2006/relationships" xmlns:p="http://schemas.openxmlformats.org/presentationml/2006/main">
+<p:sld xmlns:a="http://schemas.openxmlformats.org/drawingml/2006/main" xmlns:r="http://schemas.openxmlformats.org/officeDocument/2006/relationships" xmlns:p="http://schemas.openxmlformats.org/presentationml/2006/main" show="0">
   <p:cSld>
     <p:spTree>
       <p:nvGrpSpPr>
@@ -26839,12 +26832,8 @@
           <a:p>
             <a:pPr marL="0" indent="0"/>
             <a:r>
-              <a:rPr lang="en-US"/>
-              <a:t>27.04 </a:t>
-            </a:r>
-            <a:r>
               <a:rPr lang="en-US" dirty="0"/>
-              <a:t>- </a:t>
+              <a:t>24.10 - </a:t>
             </a:r>
             <a:r>
               <a:rPr lang="ru-RU" dirty="0"/>
@@ -26872,297 +26861,416 @@
       </p:sp>
       <p:sp>
         <p:nvSpPr>
-          <p:cNvPr id="11" name="Google Shape;209;p48">
+          <p:cNvPr id="13" name="Google Shape;209;p48">
             <a:extLst>
               <a:ext uri="{FF2B5EF4-FFF2-40B4-BE49-F238E27FC236}">
-                <a16:creationId xmlns:a16="http://schemas.microsoft.com/office/drawing/2014/main" id="{05BE3577-3C7D-6A4A-9D22-01A0FF5B385B}"/>
+                <a16:creationId xmlns:a16="http://schemas.microsoft.com/office/drawing/2014/main" id="{27723D3B-6D9B-984D-8691-FEFDDD4918C0}"/>
               </a:ext>
             </a:extLst>
           </p:cNvPr>
           <p:cNvSpPr txBox="1">
-            <a:spLocks noGrp="1"/>
+            <a:spLocks/>
           </p:cNvSpPr>
-          <p:nvPr>
-            <p:ph type="subTitle" idx="3"/>
-          </p:nvPr>
+          <p:nvPr/>
         </p:nvSpPr>
         <p:spPr>
           <a:xfrm>
             <a:off x="3082400" y="2701811"/>
-            <a:ext cx="5095500" cy="2133660"/>
+            <a:ext cx="5938750" cy="2133660"/>
           </a:xfrm>
           <a:prstGeom prst="rect">
             <a:avLst/>
           </a:prstGeom>
+          <a:noFill/>
+          <a:ln>
+            <a:noFill/>
+          </a:ln>
         </p:spPr>
         <p:txBody>
           <a:bodyPr spcFirstLastPara="1" wrap="square" lIns="91425" tIns="91425" rIns="91425" bIns="91425" anchor="t" anchorCtr="0">
-            <a:normAutofit fontScale="92500" lnSpcReduction="20000"/>
+            <a:normAutofit fontScale="85000" lnSpcReduction="20000"/>
           </a:bodyPr>
-          <a:lstStyle/>
+          <a:lstStyle>
+            <a:lvl1pPr marL="0" lvl="0" algn="l">
+              <a:lnSpc>
+                <a:spcPct val="100000"/>
+              </a:lnSpc>
+              <a:spcBef>
+                <a:spcPts val="0"/>
+              </a:spcBef>
+              <a:spcAft>
+                <a:spcPts val="0"/>
+              </a:spcAft>
+              <a:buClr>
+                <a:schemeClr val="dk1"/>
+              </a:buClr>
+              <a:buSzPts val="1300"/>
+              <a:buNone/>
+              <a:defRPr sz="1300" b="0" i="0">
+                <a:solidFill>
+                  <a:schemeClr val="dk1"/>
+                </a:solidFill>
+                <a:latin typeface="+mn-lt"/>
+                <a:ea typeface="+mn-ea"/>
+                <a:cs typeface="+mn-cs"/>
+              </a:defRPr>
+            </a:lvl1pPr>
+            <a:lvl2pPr marL="457200" lvl="1" algn="l">
+              <a:lnSpc>
+                <a:spcPct val="100000"/>
+              </a:lnSpc>
+              <a:spcBef>
+                <a:spcPts val="0"/>
+              </a:spcBef>
+              <a:spcAft>
+                <a:spcPts val="0"/>
+              </a:spcAft>
+              <a:buClr>
+                <a:schemeClr val="dk1"/>
+              </a:buClr>
+              <a:buSzPts val="1500"/>
+              <a:buNone/>
+              <a:defRPr>
+                <a:solidFill>
+                  <a:schemeClr val="dk1"/>
+                </a:solidFill>
+                <a:latin typeface="+mn-lt"/>
+                <a:ea typeface="+mn-ea"/>
+                <a:cs typeface="+mn-cs"/>
+              </a:defRPr>
+            </a:lvl2pPr>
+            <a:lvl3pPr marL="914400" lvl="2" algn="l">
+              <a:lnSpc>
+                <a:spcPct val="100000"/>
+              </a:lnSpc>
+              <a:spcBef>
+                <a:spcPts val="0"/>
+              </a:spcBef>
+              <a:spcAft>
+                <a:spcPts val="0"/>
+              </a:spcAft>
+              <a:buClr>
+                <a:schemeClr val="dk1"/>
+              </a:buClr>
+              <a:buSzPts val="1300"/>
+              <a:buNone/>
+              <a:defRPr>
+                <a:solidFill>
+                  <a:schemeClr val="dk1"/>
+                </a:solidFill>
+                <a:latin typeface="+mn-lt"/>
+                <a:ea typeface="+mn-ea"/>
+                <a:cs typeface="+mn-cs"/>
+              </a:defRPr>
+            </a:lvl3pPr>
+            <a:lvl4pPr marL="1371600" lvl="3" algn="l">
+              <a:lnSpc>
+                <a:spcPct val="100000"/>
+              </a:lnSpc>
+              <a:spcBef>
+                <a:spcPts val="0"/>
+              </a:spcBef>
+              <a:spcAft>
+                <a:spcPts val="0"/>
+              </a:spcAft>
+              <a:buClr>
+                <a:schemeClr val="dk1"/>
+              </a:buClr>
+              <a:buSzPts val="1300"/>
+              <a:buNone/>
+              <a:defRPr>
+                <a:solidFill>
+                  <a:schemeClr val="dk1"/>
+                </a:solidFill>
+                <a:latin typeface="+mn-lt"/>
+                <a:ea typeface="+mn-ea"/>
+                <a:cs typeface="+mn-cs"/>
+              </a:defRPr>
+            </a:lvl4pPr>
+            <a:lvl5pPr marL="1828800" lvl="4" algn="l">
+              <a:lnSpc>
+                <a:spcPct val="100000"/>
+              </a:lnSpc>
+              <a:spcBef>
+                <a:spcPts val="0"/>
+              </a:spcBef>
+              <a:spcAft>
+                <a:spcPts val="0"/>
+              </a:spcAft>
+              <a:buClr>
+                <a:schemeClr val="dk1"/>
+              </a:buClr>
+              <a:buSzPts val="1300"/>
+              <a:buNone/>
+              <a:defRPr>
+                <a:solidFill>
+                  <a:schemeClr val="dk1"/>
+                </a:solidFill>
+                <a:latin typeface="+mn-lt"/>
+                <a:ea typeface="+mn-ea"/>
+                <a:cs typeface="+mn-cs"/>
+              </a:defRPr>
+            </a:lvl5pPr>
+            <a:lvl6pPr marL="2286000" lvl="5" algn="l">
+              <a:lnSpc>
+                <a:spcPct val="100000"/>
+              </a:lnSpc>
+              <a:spcBef>
+                <a:spcPts val="0"/>
+              </a:spcBef>
+              <a:spcAft>
+                <a:spcPts val="0"/>
+              </a:spcAft>
+              <a:buClr>
+                <a:schemeClr val="dk1"/>
+              </a:buClr>
+              <a:buSzPts val="1300"/>
+              <a:buNone/>
+              <a:defRPr>
+                <a:solidFill>
+                  <a:schemeClr val="dk1"/>
+                </a:solidFill>
+                <a:latin typeface="+mn-lt"/>
+                <a:ea typeface="+mn-ea"/>
+                <a:cs typeface="+mn-cs"/>
+              </a:defRPr>
+            </a:lvl6pPr>
+            <a:lvl7pPr marL="2743200" lvl="6" algn="l">
+              <a:lnSpc>
+                <a:spcPct val="100000"/>
+              </a:lnSpc>
+              <a:spcBef>
+                <a:spcPts val="0"/>
+              </a:spcBef>
+              <a:spcAft>
+                <a:spcPts val="0"/>
+              </a:spcAft>
+              <a:buClr>
+                <a:schemeClr val="dk1"/>
+              </a:buClr>
+              <a:buSzPts val="1300"/>
+              <a:buNone/>
+              <a:defRPr>
+                <a:solidFill>
+                  <a:schemeClr val="dk1"/>
+                </a:solidFill>
+                <a:latin typeface="+mn-lt"/>
+                <a:ea typeface="+mn-ea"/>
+                <a:cs typeface="+mn-cs"/>
+              </a:defRPr>
+            </a:lvl7pPr>
+            <a:lvl8pPr marL="3200400" lvl="7" algn="l">
+              <a:lnSpc>
+                <a:spcPct val="100000"/>
+              </a:lnSpc>
+              <a:spcBef>
+                <a:spcPts val="0"/>
+              </a:spcBef>
+              <a:spcAft>
+                <a:spcPts val="0"/>
+              </a:spcAft>
+              <a:buClr>
+                <a:schemeClr val="dk1"/>
+              </a:buClr>
+              <a:buSzPts val="1300"/>
+              <a:buNone/>
+              <a:defRPr>
+                <a:solidFill>
+                  <a:schemeClr val="dk1"/>
+                </a:solidFill>
+                <a:latin typeface="+mn-lt"/>
+                <a:ea typeface="+mn-ea"/>
+                <a:cs typeface="+mn-cs"/>
+              </a:defRPr>
+            </a:lvl8pPr>
+            <a:lvl9pPr marL="3657600" lvl="8" algn="l">
+              <a:lnSpc>
+                <a:spcPct val="100000"/>
+              </a:lnSpc>
+              <a:spcBef>
+                <a:spcPts val="0"/>
+              </a:spcBef>
+              <a:spcAft>
+                <a:spcPts val="0"/>
+              </a:spcAft>
+              <a:buClr>
+                <a:schemeClr val="dk1"/>
+              </a:buClr>
+              <a:buSzPts val="1300"/>
+              <a:buNone/>
+              <a:defRPr>
+                <a:solidFill>
+                  <a:schemeClr val="dk1"/>
+                </a:solidFill>
+                <a:latin typeface="+mn-lt"/>
+                <a:ea typeface="+mn-ea"/>
+                <a:cs typeface="+mn-cs"/>
+              </a:defRPr>
+            </a:lvl9pPr>
+          </a:lstStyle>
           <a:p>
-            <a:pPr marL="0" indent="0"/>
+            <a:pPr marL="1470025" indent="-1465263">
+              <a:tabLst>
+                <a:tab pos="1465263" algn="l"/>
+              </a:tabLst>
+            </a:pPr>
             <a:r>
-              <a:rPr lang="ru-RU" sz="1150" b="1" dirty="0"/>
+              <a:rPr lang="ru-RU" sz="1150" b="1" kern="0" dirty="0"/>
               <a:t>Руководитель курсов: </a:t>
             </a:r>
             <a:r>
-              <a:rPr lang="en-US" sz="1150" b="1" dirty="0"/>
-              <a:t>Reinforcement Learning</a:t>
+              <a:rPr lang="en-US" sz="1150" b="1" kern="0" dirty="0"/>
+              <a:t>	Reinforcement Learning, ML Professional, ML Basic, </a:t>
+            </a:r>
+            <a:br>
+              <a:rPr lang="en-US" sz="1150" b="1" kern="0" dirty="0"/>
+            </a:br>
+            <a:r>
+              <a:rPr lang="en-US" sz="1150" b="1" kern="0" dirty="0" err="1"/>
+              <a:t>MLOps</a:t>
             </a:r>
             <a:r>
-              <a:rPr lang="ru-RU" sz="1150" b="1" dirty="0"/>
+              <a:rPr lang="en-US" sz="1150" b="1" kern="0" dirty="0"/>
               <a:t>, </a:t>
             </a:r>
             <a:r>
-              <a:rPr lang="en-US" sz="1150" b="1" dirty="0"/>
-              <a:t>ML Professional, ML Basic</a:t>
+              <a:rPr lang="en-US" sz="1150" b="1" kern="0" dirty="0" err="1"/>
+              <a:t>FinML</a:t>
             </a:r>
-            <a:endParaRPr lang="ru-RU" sz="1150" b="1" dirty="0"/>
+            <a:endParaRPr lang="en-US" sz="1150" b="1" kern="0" dirty="0"/>
           </a:p>
           <a:p>
-            <a:pPr marL="0" marR="0" lvl="0" indent="0" algn="l" rtl="0">
-              <a:lnSpc>
-                <a:spcPct val="100000"/>
-              </a:lnSpc>
-              <a:spcBef>
-                <a:spcPts val="0"/>
-              </a:spcBef>
-              <a:spcAft>
-                <a:spcPts val="0"/>
-              </a:spcAft>
-              <a:buNone/>
-            </a:pPr>
-            <a:endParaRPr lang="en-US" sz="1150" b="1" dirty="0"/>
+            <a:pPr rtl="0"/>
+            <a:endParaRPr lang="en-US" sz="1150" b="1" kern="0" dirty="0"/>
           </a:p>
           <a:p>
-            <a:pPr marL="0" marR="0" lvl="0" indent="0" algn="l" rtl="0">
-              <a:lnSpc>
-                <a:spcPct val="100000"/>
-              </a:lnSpc>
-              <a:spcBef>
-                <a:spcPts val="0"/>
-              </a:spcBef>
-              <a:spcAft>
-                <a:spcPts val="0"/>
-              </a:spcAft>
-              <a:buNone/>
-            </a:pPr>
+            <a:pPr rtl="0"/>
             <a:r>
-              <a:rPr lang="en-US" sz="1150" b="1" dirty="0" err="1"/>
+              <a:rPr lang="en-US" sz="1150" b="1" kern="0" dirty="0" err="1"/>
               <a:t>Teamlead</a:t>
             </a:r>
-            <a:r>
-              <a:rPr lang="ru-RU" sz="1150" b="1" dirty="0"/>
-              <a:t>, главный инженер проекта</a:t>
-            </a:r>
-            <a:r>
-              <a:rPr lang="en-US" sz="1150" b="1" dirty="0"/>
-              <a:t>, </a:t>
-            </a:r>
-            <a:endParaRPr lang="ru-RU" sz="1150" b="1" dirty="0"/>
+            <a:endParaRPr lang="ru-RU" sz="1150" b="1" kern="0" dirty="0"/>
           </a:p>
           <a:p>
-            <a:pPr marL="0" marR="0" lvl="0" indent="0" algn="l" rtl="0">
-              <a:lnSpc>
-                <a:spcPct val="100000"/>
-              </a:lnSpc>
-              <a:spcBef>
-                <a:spcPts val="0"/>
-              </a:spcBef>
-              <a:spcAft>
-                <a:spcPts val="0"/>
-              </a:spcAft>
-              <a:buNone/>
-            </a:pPr>
+            <a:pPr rtl="0"/>
             <a:r>
-              <a:rPr lang="ru-RU" sz="1150" b="1" dirty="0"/>
+              <a:rPr lang="ru-RU" sz="1150" b="1" kern="0" dirty="0"/>
               <a:t>Физический факультет МГУ, </a:t>
             </a:r>
             <a:r>
-              <a:rPr lang="en-US" sz="1150" b="1" dirty="0"/>
+              <a:rPr lang="en-US" sz="1150" b="1" kern="0" dirty="0"/>
               <a:t>PhD </a:t>
             </a:r>
             <a:r>
-              <a:rPr lang="ru-RU" sz="1150" b="1" dirty="0"/>
+              <a:rPr lang="ru-RU" sz="1150" b="1" kern="0" dirty="0"/>
               <a:t>теоретическая физика</a:t>
             </a:r>
           </a:p>
           <a:p>
-            <a:pPr marL="0" marR="0" lvl="0" indent="0" algn="l" rtl="0">
-              <a:lnSpc>
-                <a:spcPct val="100000"/>
-              </a:lnSpc>
-              <a:spcBef>
-                <a:spcPts val="0"/>
-              </a:spcBef>
-              <a:spcAft>
-                <a:spcPts val="0"/>
-              </a:spcAft>
-              <a:buNone/>
-            </a:pPr>
-            <a:endParaRPr sz="1150" dirty="0"/>
+            <a:pPr rtl="0"/>
+            <a:endParaRPr lang="ru-RU" sz="1150" kern="0" dirty="0"/>
           </a:p>
           <a:p>
-            <a:pPr marL="0" marR="0" lvl="0" indent="0" algn="l" rtl="0">
-              <a:lnSpc>
-                <a:spcPct val="100000"/>
-              </a:lnSpc>
-              <a:spcBef>
-                <a:spcPts val="0"/>
-              </a:spcBef>
-              <a:spcAft>
-                <a:spcPts val="0"/>
-              </a:spcAft>
-              <a:buNone/>
-            </a:pPr>
+            <a:pPr rtl="0"/>
             <a:r>
-              <a:rPr lang="ru" sz="1150" b="1" dirty="0"/>
+              <a:rPr lang="ru-RU" sz="1150" b="1" kern="0" dirty="0"/>
               <a:t>Опыт:</a:t>
             </a:r>
-            <a:endParaRPr sz="1150" dirty="0"/>
+            <a:endParaRPr lang="ru-RU" sz="1150" kern="0" dirty="0"/>
           </a:p>
           <a:p>
-            <a:pPr marL="0" marR="0" lvl="0" indent="0" algn="l" rtl="0">
-              <a:lnSpc>
-                <a:spcPct val="100000"/>
-              </a:lnSpc>
-              <a:spcBef>
-                <a:spcPts val="0"/>
-              </a:spcBef>
-              <a:spcAft>
-                <a:spcPts val="0"/>
-              </a:spcAft>
-              <a:buNone/>
-            </a:pPr>
+            <a:pPr rtl="0"/>
             <a:r>
-              <a:rPr lang="ru-RU" sz="1150" dirty="0"/>
-              <a:t>Б</a:t>
-            </a:r>
-            <a:r>
-              <a:rPr lang="ru" sz="1150" dirty="0"/>
-              <a:t>олее 15 лет занимался прикладной математикой и мат моделированием</a:t>
+              <a:rPr lang="ru-RU" sz="1150" kern="0" dirty="0"/>
+              <a:t>Более 15 лет занимался прикладной математикой и мат моделированием</a:t>
             </a:r>
           </a:p>
           <a:p>
-            <a:pPr marL="0" marR="0" lvl="0" indent="0" algn="l" rtl="0">
-              <a:lnSpc>
-                <a:spcPct val="100000"/>
-              </a:lnSpc>
-              <a:spcBef>
-                <a:spcPts val="0"/>
-              </a:spcBef>
-              <a:spcAft>
-                <a:spcPts val="0"/>
-              </a:spcAft>
-              <a:buNone/>
-            </a:pPr>
+            <a:pPr rtl="0"/>
             <a:r>
-              <a:rPr lang="ru" sz="1150" dirty="0"/>
-              <a:t>(Data Scientist) (Python, С++) в НИИ ПАО Газпром</a:t>
+              <a:rPr lang="ru-RU" sz="1150" kern="0" dirty="0"/>
+              <a:t>(</a:t>
             </a:r>
-            <a:endParaRPr sz="1150" dirty="0"/>
+            <a:r>
+              <a:rPr lang="en-US" sz="1150" kern="0" dirty="0"/>
+              <a:t>Data Scientist) (Python, </a:t>
+            </a:r>
+            <a:r>
+              <a:rPr lang="ru-RU" sz="1150" kern="0" dirty="0"/>
+              <a:t>С++)</a:t>
+            </a:r>
           </a:p>
           <a:p>
-            <a:pPr marL="0" marR="0" lvl="0" indent="0" algn="l" rtl="0">
-              <a:lnSpc>
-                <a:spcPct val="100000"/>
-              </a:lnSpc>
-              <a:spcBef>
-                <a:spcPts val="0"/>
-              </a:spcBef>
-              <a:spcAft>
-                <a:spcPts val="0"/>
-              </a:spcAft>
-              <a:buNone/>
-            </a:pPr>
-            <a:endParaRPr sz="1150" dirty="0"/>
+            <a:pPr rtl="0"/>
+            <a:endParaRPr lang="ru-RU" sz="1150" kern="0" dirty="0"/>
           </a:p>
           <a:p>
-            <a:pPr marL="0" marR="0" lvl="0" indent="0" algn="l" rtl="0">
-              <a:lnSpc>
-                <a:spcPct val="100000"/>
-              </a:lnSpc>
-              <a:spcBef>
-                <a:spcPts val="0"/>
-              </a:spcBef>
-              <a:spcAft>
-                <a:spcPts val="0"/>
-              </a:spcAft>
-              <a:buNone/>
-            </a:pPr>
-            <a:endParaRPr lang="en-US" sz="1150" b="1" dirty="0"/>
+            <a:pPr rtl="0"/>
+            <a:endParaRPr lang="ru-RU" sz="1150" b="1" kern="0" dirty="0"/>
           </a:p>
           <a:p>
-            <a:pPr marL="0" marR="0" lvl="0" indent="0" algn="l" rtl="0">
-              <a:lnSpc>
-                <a:spcPct val="100000"/>
-              </a:lnSpc>
-              <a:spcBef>
-                <a:spcPts val="0"/>
-              </a:spcBef>
-              <a:spcAft>
-                <a:spcPts val="0"/>
-              </a:spcAft>
-              <a:buNone/>
-            </a:pPr>
+            <a:pPr rtl="0"/>
             <a:r>
-              <a:rPr lang="en-US" sz="1150" b="1" dirty="0"/>
+              <a:rPr lang="ru-RU" sz="1150" b="1" kern="0" dirty="0"/>
               <a:t>@</a:t>
             </a:r>
             <a:r>
-              <a:rPr lang="en-US" sz="1150" b="1" dirty="0" err="1"/>
+              <a:rPr lang="en-US" sz="1150" b="1" kern="0" dirty="0" err="1"/>
               <a:t>stureiko</a:t>
             </a:r>
             <a:r>
-              <a:rPr lang="en-US" sz="1150" b="1" dirty="0"/>
+              <a:rPr lang="en-US" sz="1150" b="1" kern="0" dirty="0"/>
               <a:t> (TG)</a:t>
             </a:r>
-            <a:endParaRPr lang="ru-RU" sz="1150" b="1" dirty="0"/>
           </a:p>
           <a:p>
-            <a:pPr marL="0" marR="0" lvl="0" indent="0" algn="l" rtl="0">
-              <a:lnSpc>
-                <a:spcPct val="100000"/>
-              </a:lnSpc>
-              <a:spcBef>
-                <a:spcPts val="0"/>
-              </a:spcBef>
-              <a:spcAft>
-                <a:spcPts val="0"/>
-              </a:spcAft>
-              <a:buNone/>
-            </a:pPr>
-            <a:endParaRPr lang="ru-RU" sz="1150" b="1" dirty="0"/>
+            <a:pPr rtl="0"/>
+            <a:endParaRPr lang="en-US" sz="1150" b="1" kern="0" dirty="0"/>
           </a:p>
           <a:p>
-            <a:pPr marL="0" marR="0" lvl="0" indent="0" algn="l" rtl="0">
-              <a:lnSpc>
-                <a:spcPct val="100000"/>
-              </a:lnSpc>
-              <a:spcBef>
-                <a:spcPts val="0"/>
-              </a:spcBef>
-              <a:spcAft>
-                <a:spcPts val="0"/>
-              </a:spcAft>
-              <a:buNone/>
-            </a:pPr>
+            <a:pPr rtl="0"/>
             <a:r>
-              <a:rPr lang="en-US" sz="1150" b="1" dirty="0"/>
+              <a:rPr lang="en-US" sz="1150" b="1" kern="0" dirty="0"/>
               <a:t>LinkedIn: </a:t>
             </a:r>
             <a:r>
-              <a:rPr lang="en-US" sz="1150" dirty="0">
+              <a:rPr lang="en-US" sz="1150" kern="0" dirty="0">
                 <a:hlinkClick r:id="rId4"/>
               </a:rPr>
               <a:t>igor-stureiko</a:t>
             </a:r>
             <a:r>
-              <a:rPr lang="en-US" sz="1150" dirty="0"/>
+              <a:rPr lang="en-US" sz="1150" kern="0" dirty="0"/>
               <a:t> </a:t>
             </a:r>
-            <a:endParaRPr sz="1400" dirty="0"/>
+          </a:p>
+          <a:p>
+            <a:pPr rtl="0"/>
+            <a:endParaRPr lang="en-US" sz="1150" kern="0" dirty="0"/>
+          </a:p>
+          <a:p>
+            <a:pPr rtl="0"/>
+            <a:r>
+              <a:rPr lang="en-US" sz="1150" b="1" kern="0" dirty="0"/>
+              <a:t>@</a:t>
+            </a:r>
+            <a:r>
+              <a:rPr lang="en-US" sz="1150" b="1" kern="0" dirty="0" err="1"/>
+              <a:t>rl_fintech</a:t>
+            </a:r>
+            <a:r>
+              <a:rPr lang="en-US" sz="1150" b="1" kern="0" dirty="0"/>
+              <a:t> </a:t>
+            </a:r>
+            <a:r>
+              <a:rPr lang="en-US" sz="1150" kern="0" dirty="0"/>
+              <a:t>(</a:t>
+            </a:r>
+            <a:r>
+              <a:rPr lang="ru-RU" sz="1150" kern="0" dirty="0"/>
+              <a:t>Мой канал о моделях в бизнесе)</a:t>
+            </a:r>
+            <a:endParaRPr lang="ru-RU" sz="1400" kern="0" dirty="0"/>
           </a:p>
         </p:txBody>
       </p:sp>
@@ -27434,297 +27542,416 @@
       </p:pic>
       <p:sp>
         <p:nvSpPr>
-          <p:cNvPr id="10" name="Google Shape;209;p48">
+          <p:cNvPr id="11" name="Google Shape;209;p48">
             <a:extLst>
               <a:ext uri="{FF2B5EF4-FFF2-40B4-BE49-F238E27FC236}">
-                <a16:creationId xmlns:a16="http://schemas.microsoft.com/office/drawing/2014/main" id="{ABBDF15B-866B-E64C-AF21-19F358C4E052}"/>
+                <a16:creationId xmlns:a16="http://schemas.microsoft.com/office/drawing/2014/main" id="{0D0C01BA-302B-2E44-89CB-05E54E33994D}"/>
               </a:ext>
             </a:extLst>
           </p:cNvPr>
           <p:cNvSpPr txBox="1">
-            <a:spLocks noGrp="1"/>
+            <a:spLocks/>
           </p:cNvSpPr>
-          <p:nvPr>
-            <p:ph type="subTitle" idx="3"/>
-          </p:nvPr>
+          <p:nvPr/>
         </p:nvSpPr>
         <p:spPr>
           <a:xfrm>
             <a:off x="3082400" y="2701811"/>
-            <a:ext cx="5095500" cy="2133660"/>
+            <a:ext cx="5938750" cy="2133660"/>
           </a:xfrm>
           <a:prstGeom prst="rect">
             <a:avLst/>
           </a:prstGeom>
+          <a:noFill/>
+          <a:ln>
+            <a:noFill/>
+          </a:ln>
         </p:spPr>
         <p:txBody>
           <a:bodyPr spcFirstLastPara="1" wrap="square" lIns="91425" tIns="91425" rIns="91425" bIns="91425" anchor="t" anchorCtr="0">
-            <a:normAutofit fontScale="92500" lnSpcReduction="20000"/>
+            <a:normAutofit fontScale="85000" lnSpcReduction="20000"/>
           </a:bodyPr>
-          <a:lstStyle/>
+          <a:lstStyle>
+            <a:lvl1pPr marL="0" lvl="0" algn="l">
+              <a:lnSpc>
+                <a:spcPct val="100000"/>
+              </a:lnSpc>
+              <a:spcBef>
+                <a:spcPts val="0"/>
+              </a:spcBef>
+              <a:spcAft>
+                <a:spcPts val="0"/>
+              </a:spcAft>
+              <a:buClr>
+                <a:schemeClr val="dk1"/>
+              </a:buClr>
+              <a:buSzPts val="1300"/>
+              <a:buNone/>
+              <a:defRPr sz="1300" b="0" i="0">
+                <a:solidFill>
+                  <a:schemeClr val="dk1"/>
+                </a:solidFill>
+                <a:latin typeface="+mn-lt"/>
+                <a:ea typeface="+mn-ea"/>
+                <a:cs typeface="+mn-cs"/>
+              </a:defRPr>
+            </a:lvl1pPr>
+            <a:lvl2pPr marL="457200" lvl="1" algn="l">
+              <a:lnSpc>
+                <a:spcPct val="100000"/>
+              </a:lnSpc>
+              <a:spcBef>
+                <a:spcPts val="0"/>
+              </a:spcBef>
+              <a:spcAft>
+                <a:spcPts val="0"/>
+              </a:spcAft>
+              <a:buClr>
+                <a:schemeClr val="dk1"/>
+              </a:buClr>
+              <a:buSzPts val="1500"/>
+              <a:buNone/>
+              <a:defRPr>
+                <a:solidFill>
+                  <a:schemeClr val="dk1"/>
+                </a:solidFill>
+                <a:latin typeface="+mn-lt"/>
+                <a:ea typeface="+mn-ea"/>
+                <a:cs typeface="+mn-cs"/>
+              </a:defRPr>
+            </a:lvl2pPr>
+            <a:lvl3pPr marL="914400" lvl="2" algn="l">
+              <a:lnSpc>
+                <a:spcPct val="100000"/>
+              </a:lnSpc>
+              <a:spcBef>
+                <a:spcPts val="0"/>
+              </a:spcBef>
+              <a:spcAft>
+                <a:spcPts val="0"/>
+              </a:spcAft>
+              <a:buClr>
+                <a:schemeClr val="dk1"/>
+              </a:buClr>
+              <a:buSzPts val="1300"/>
+              <a:buNone/>
+              <a:defRPr>
+                <a:solidFill>
+                  <a:schemeClr val="dk1"/>
+                </a:solidFill>
+                <a:latin typeface="+mn-lt"/>
+                <a:ea typeface="+mn-ea"/>
+                <a:cs typeface="+mn-cs"/>
+              </a:defRPr>
+            </a:lvl3pPr>
+            <a:lvl4pPr marL="1371600" lvl="3" algn="l">
+              <a:lnSpc>
+                <a:spcPct val="100000"/>
+              </a:lnSpc>
+              <a:spcBef>
+                <a:spcPts val="0"/>
+              </a:spcBef>
+              <a:spcAft>
+                <a:spcPts val="0"/>
+              </a:spcAft>
+              <a:buClr>
+                <a:schemeClr val="dk1"/>
+              </a:buClr>
+              <a:buSzPts val="1300"/>
+              <a:buNone/>
+              <a:defRPr>
+                <a:solidFill>
+                  <a:schemeClr val="dk1"/>
+                </a:solidFill>
+                <a:latin typeface="+mn-lt"/>
+                <a:ea typeface="+mn-ea"/>
+                <a:cs typeface="+mn-cs"/>
+              </a:defRPr>
+            </a:lvl4pPr>
+            <a:lvl5pPr marL="1828800" lvl="4" algn="l">
+              <a:lnSpc>
+                <a:spcPct val="100000"/>
+              </a:lnSpc>
+              <a:spcBef>
+                <a:spcPts val="0"/>
+              </a:spcBef>
+              <a:spcAft>
+                <a:spcPts val="0"/>
+              </a:spcAft>
+              <a:buClr>
+                <a:schemeClr val="dk1"/>
+              </a:buClr>
+              <a:buSzPts val="1300"/>
+              <a:buNone/>
+              <a:defRPr>
+                <a:solidFill>
+                  <a:schemeClr val="dk1"/>
+                </a:solidFill>
+                <a:latin typeface="+mn-lt"/>
+                <a:ea typeface="+mn-ea"/>
+                <a:cs typeface="+mn-cs"/>
+              </a:defRPr>
+            </a:lvl5pPr>
+            <a:lvl6pPr marL="2286000" lvl="5" algn="l">
+              <a:lnSpc>
+                <a:spcPct val="100000"/>
+              </a:lnSpc>
+              <a:spcBef>
+                <a:spcPts val="0"/>
+              </a:spcBef>
+              <a:spcAft>
+                <a:spcPts val="0"/>
+              </a:spcAft>
+              <a:buClr>
+                <a:schemeClr val="dk1"/>
+              </a:buClr>
+              <a:buSzPts val="1300"/>
+              <a:buNone/>
+              <a:defRPr>
+                <a:solidFill>
+                  <a:schemeClr val="dk1"/>
+                </a:solidFill>
+                <a:latin typeface="+mn-lt"/>
+                <a:ea typeface="+mn-ea"/>
+                <a:cs typeface="+mn-cs"/>
+              </a:defRPr>
+            </a:lvl6pPr>
+            <a:lvl7pPr marL="2743200" lvl="6" algn="l">
+              <a:lnSpc>
+                <a:spcPct val="100000"/>
+              </a:lnSpc>
+              <a:spcBef>
+                <a:spcPts val="0"/>
+              </a:spcBef>
+              <a:spcAft>
+                <a:spcPts val="0"/>
+              </a:spcAft>
+              <a:buClr>
+                <a:schemeClr val="dk1"/>
+              </a:buClr>
+              <a:buSzPts val="1300"/>
+              <a:buNone/>
+              <a:defRPr>
+                <a:solidFill>
+                  <a:schemeClr val="dk1"/>
+                </a:solidFill>
+                <a:latin typeface="+mn-lt"/>
+                <a:ea typeface="+mn-ea"/>
+                <a:cs typeface="+mn-cs"/>
+              </a:defRPr>
+            </a:lvl7pPr>
+            <a:lvl8pPr marL="3200400" lvl="7" algn="l">
+              <a:lnSpc>
+                <a:spcPct val="100000"/>
+              </a:lnSpc>
+              <a:spcBef>
+                <a:spcPts val="0"/>
+              </a:spcBef>
+              <a:spcAft>
+                <a:spcPts val="0"/>
+              </a:spcAft>
+              <a:buClr>
+                <a:schemeClr val="dk1"/>
+              </a:buClr>
+              <a:buSzPts val="1300"/>
+              <a:buNone/>
+              <a:defRPr>
+                <a:solidFill>
+                  <a:schemeClr val="dk1"/>
+                </a:solidFill>
+                <a:latin typeface="+mn-lt"/>
+                <a:ea typeface="+mn-ea"/>
+                <a:cs typeface="+mn-cs"/>
+              </a:defRPr>
+            </a:lvl8pPr>
+            <a:lvl9pPr marL="3657600" lvl="8" algn="l">
+              <a:lnSpc>
+                <a:spcPct val="100000"/>
+              </a:lnSpc>
+              <a:spcBef>
+                <a:spcPts val="0"/>
+              </a:spcBef>
+              <a:spcAft>
+                <a:spcPts val="0"/>
+              </a:spcAft>
+              <a:buClr>
+                <a:schemeClr val="dk1"/>
+              </a:buClr>
+              <a:buSzPts val="1300"/>
+              <a:buNone/>
+              <a:defRPr>
+                <a:solidFill>
+                  <a:schemeClr val="dk1"/>
+                </a:solidFill>
+                <a:latin typeface="+mn-lt"/>
+                <a:ea typeface="+mn-ea"/>
+                <a:cs typeface="+mn-cs"/>
+              </a:defRPr>
+            </a:lvl9pPr>
+          </a:lstStyle>
           <a:p>
-            <a:pPr marL="0" indent="0"/>
+            <a:pPr marL="1470025" indent="-1465263">
+              <a:tabLst>
+                <a:tab pos="1465263" algn="l"/>
+              </a:tabLst>
+            </a:pPr>
             <a:r>
-              <a:rPr lang="ru-RU" sz="1150" b="1" dirty="0"/>
+              <a:rPr lang="ru-RU" sz="1150" b="1" kern="0" dirty="0"/>
               <a:t>Руководитель курсов: </a:t>
             </a:r>
             <a:r>
-              <a:rPr lang="en-US" sz="1150" b="1" dirty="0"/>
-              <a:t>Reinforcement Learning</a:t>
+              <a:rPr lang="en-US" sz="1150" b="1" kern="0" dirty="0"/>
+              <a:t>	Reinforcement Learning, ML Professional, ML Basic, </a:t>
+            </a:r>
+            <a:br>
+              <a:rPr lang="en-US" sz="1150" b="1" kern="0" dirty="0"/>
+            </a:br>
+            <a:r>
+              <a:rPr lang="en-US" sz="1150" b="1" kern="0" dirty="0" err="1"/>
+              <a:t>MLOps</a:t>
             </a:r>
             <a:r>
-              <a:rPr lang="ru-RU" sz="1150" b="1" dirty="0"/>
+              <a:rPr lang="en-US" sz="1150" b="1" kern="0" dirty="0"/>
               <a:t>, </a:t>
             </a:r>
             <a:r>
-              <a:rPr lang="en-US" sz="1150" b="1" dirty="0"/>
-              <a:t>ML Professional, ML Basic</a:t>
+              <a:rPr lang="en-US" sz="1150" b="1" kern="0" dirty="0" err="1"/>
+              <a:t>FinML</a:t>
             </a:r>
-            <a:endParaRPr lang="ru-RU" sz="1150" b="1" dirty="0"/>
+            <a:endParaRPr lang="en-US" sz="1150" b="1" kern="0" dirty="0"/>
           </a:p>
           <a:p>
-            <a:pPr marL="0" marR="0" lvl="0" indent="0" algn="l" rtl="0">
-              <a:lnSpc>
-                <a:spcPct val="100000"/>
-              </a:lnSpc>
-              <a:spcBef>
-                <a:spcPts val="0"/>
-              </a:spcBef>
-              <a:spcAft>
-                <a:spcPts val="0"/>
-              </a:spcAft>
-              <a:buNone/>
-            </a:pPr>
-            <a:endParaRPr lang="en-US" sz="1150" b="1" dirty="0"/>
+            <a:pPr rtl="0"/>
+            <a:endParaRPr lang="en-US" sz="1150" b="1" kern="0" dirty="0"/>
           </a:p>
           <a:p>
-            <a:pPr marL="0" marR="0" lvl="0" indent="0" algn="l" rtl="0">
-              <a:lnSpc>
-                <a:spcPct val="100000"/>
-              </a:lnSpc>
-              <a:spcBef>
-                <a:spcPts val="0"/>
-              </a:spcBef>
-              <a:spcAft>
-                <a:spcPts val="0"/>
-              </a:spcAft>
-              <a:buNone/>
-            </a:pPr>
+            <a:pPr rtl="0"/>
             <a:r>
-              <a:rPr lang="en-US" sz="1150" b="1" dirty="0" err="1"/>
+              <a:rPr lang="en-US" sz="1150" b="1" kern="0" dirty="0" err="1"/>
               <a:t>Teamlead</a:t>
             </a:r>
-            <a:r>
-              <a:rPr lang="ru-RU" sz="1150" b="1" dirty="0"/>
-              <a:t>, главный инженер проекта</a:t>
-            </a:r>
-            <a:r>
-              <a:rPr lang="en-US" sz="1150" b="1" dirty="0"/>
-              <a:t>, </a:t>
-            </a:r>
-            <a:endParaRPr lang="ru-RU" sz="1150" b="1" dirty="0"/>
+            <a:endParaRPr lang="ru-RU" sz="1150" b="1" kern="0" dirty="0"/>
           </a:p>
           <a:p>
-            <a:pPr marL="0" marR="0" lvl="0" indent="0" algn="l" rtl="0">
-              <a:lnSpc>
-                <a:spcPct val="100000"/>
-              </a:lnSpc>
-              <a:spcBef>
-                <a:spcPts val="0"/>
-              </a:spcBef>
-              <a:spcAft>
-                <a:spcPts val="0"/>
-              </a:spcAft>
-              <a:buNone/>
-            </a:pPr>
+            <a:pPr rtl="0"/>
             <a:r>
-              <a:rPr lang="ru-RU" sz="1150" b="1" dirty="0"/>
+              <a:rPr lang="ru-RU" sz="1150" b="1" kern="0" dirty="0"/>
               <a:t>Физический факультет МГУ, </a:t>
             </a:r>
             <a:r>
-              <a:rPr lang="en-US" sz="1150" b="1" dirty="0"/>
+              <a:rPr lang="en-US" sz="1150" b="1" kern="0" dirty="0"/>
               <a:t>PhD </a:t>
             </a:r>
             <a:r>
-              <a:rPr lang="ru-RU" sz="1150" b="1" dirty="0"/>
+              <a:rPr lang="ru-RU" sz="1150" b="1" kern="0" dirty="0"/>
               <a:t>теоретическая физика</a:t>
             </a:r>
           </a:p>
           <a:p>
-            <a:pPr marL="0" marR="0" lvl="0" indent="0" algn="l" rtl="0">
-              <a:lnSpc>
-                <a:spcPct val="100000"/>
-              </a:lnSpc>
-              <a:spcBef>
-                <a:spcPts val="0"/>
-              </a:spcBef>
-              <a:spcAft>
-                <a:spcPts val="0"/>
-              </a:spcAft>
-              <a:buNone/>
-            </a:pPr>
-            <a:endParaRPr sz="1150" dirty="0"/>
+            <a:pPr rtl="0"/>
+            <a:endParaRPr lang="ru-RU" sz="1150" kern="0" dirty="0"/>
           </a:p>
           <a:p>
-            <a:pPr marL="0" marR="0" lvl="0" indent="0" algn="l" rtl="0">
-              <a:lnSpc>
-                <a:spcPct val="100000"/>
-              </a:lnSpc>
-              <a:spcBef>
-                <a:spcPts val="0"/>
-              </a:spcBef>
-              <a:spcAft>
-                <a:spcPts val="0"/>
-              </a:spcAft>
-              <a:buNone/>
-            </a:pPr>
+            <a:pPr rtl="0"/>
             <a:r>
-              <a:rPr lang="ru" sz="1150" b="1" dirty="0"/>
+              <a:rPr lang="ru-RU" sz="1150" b="1" kern="0" dirty="0"/>
               <a:t>Опыт:</a:t>
             </a:r>
-            <a:endParaRPr sz="1150" dirty="0"/>
+            <a:endParaRPr lang="ru-RU" sz="1150" kern="0" dirty="0"/>
           </a:p>
           <a:p>
-            <a:pPr marL="0" marR="0" lvl="0" indent="0" algn="l" rtl="0">
-              <a:lnSpc>
-                <a:spcPct val="100000"/>
-              </a:lnSpc>
-              <a:spcBef>
-                <a:spcPts val="0"/>
-              </a:spcBef>
-              <a:spcAft>
-                <a:spcPts val="0"/>
-              </a:spcAft>
-              <a:buNone/>
-            </a:pPr>
+            <a:pPr rtl="0"/>
             <a:r>
-              <a:rPr lang="ru-RU" sz="1150" dirty="0"/>
-              <a:t>Б</a:t>
-            </a:r>
-            <a:r>
-              <a:rPr lang="ru" sz="1150" dirty="0"/>
-              <a:t>олее 15 лет занимался прикладной математикой и мат моделированием</a:t>
+              <a:rPr lang="ru-RU" sz="1150" kern="0" dirty="0"/>
+              <a:t>Более 15 лет занимался прикладной математикой и мат моделированием</a:t>
             </a:r>
           </a:p>
           <a:p>
-            <a:pPr marL="0" marR="0" lvl="0" indent="0" algn="l" rtl="0">
-              <a:lnSpc>
-                <a:spcPct val="100000"/>
-              </a:lnSpc>
-              <a:spcBef>
-                <a:spcPts val="0"/>
-              </a:spcBef>
-              <a:spcAft>
-                <a:spcPts val="0"/>
-              </a:spcAft>
-              <a:buNone/>
-            </a:pPr>
+            <a:pPr rtl="0"/>
             <a:r>
-              <a:rPr lang="ru" sz="1150" dirty="0"/>
-              <a:t>(Data Scientist) (Python, С++) в НИИ ПАО Газпром</a:t>
+              <a:rPr lang="ru-RU" sz="1150" kern="0" dirty="0"/>
+              <a:t>(</a:t>
             </a:r>
-            <a:endParaRPr sz="1150" dirty="0"/>
+            <a:r>
+              <a:rPr lang="en-US" sz="1150" kern="0" dirty="0"/>
+              <a:t>Data Scientist) (Python, </a:t>
+            </a:r>
+            <a:r>
+              <a:rPr lang="ru-RU" sz="1150" kern="0" dirty="0"/>
+              <a:t>С++)</a:t>
+            </a:r>
           </a:p>
           <a:p>
-            <a:pPr marL="0" marR="0" lvl="0" indent="0" algn="l" rtl="0">
-              <a:lnSpc>
-                <a:spcPct val="100000"/>
-              </a:lnSpc>
-              <a:spcBef>
-                <a:spcPts val="0"/>
-              </a:spcBef>
-              <a:spcAft>
-                <a:spcPts val="0"/>
-              </a:spcAft>
-              <a:buNone/>
-            </a:pPr>
-            <a:endParaRPr sz="1150" dirty="0"/>
+            <a:pPr rtl="0"/>
+            <a:endParaRPr lang="ru-RU" sz="1150" kern="0" dirty="0"/>
           </a:p>
           <a:p>
-            <a:pPr marL="0" marR="0" lvl="0" indent="0" algn="l" rtl="0">
-              <a:lnSpc>
-                <a:spcPct val="100000"/>
-              </a:lnSpc>
-              <a:spcBef>
-                <a:spcPts val="0"/>
-              </a:spcBef>
-              <a:spcAft>
-                <a:spcPts val="0"/>
-              </a:spcAft>
-              <a:buNone/>
-            </a:pPr>
-            <a:endParaRPr lang="en-US" sz="1150" b="1" dirty="0"/>
+            <a:pPr rtl="0"/>
+            <a:endParaRPr lang="ru-RU" sz="1150" b="1" kern="0" dirty="0"/>
           </a:p>
           <a:p>
-            <a:pPr marL="0" marR="0" lvl="0" indent="0" algn="l" rtl="0">
-              <a:lnSpc>
-                <a:spcPct val="100000"/>
-              </a:lnSpc>
-              <a:spcBef>
-                <a:spcPts val="0"/>
-              </a:spcBef>
-              <a:spcAft>
-                <a:spcPts val="0"/>
-              </a:spcAft>
-              <a:buNone/>
-            </a:pPr>
+            <a:pPr rtl="0"/>
             <a:r>
-              <a:rPr lang="en-US" sz="1150" b="1" dirty="0"/>
+              <a:rPr lang="ru-RU" sz="1150" b="1" kern="0" dirty="0"/>
               <a:t>@</a:t>
             </a:r>
             <a:r>
-              <a:rPr lang="en-US" sz="1150" b="1" dirty="0" err="1"/>
+              <a:rPr lang="en-US" sz="1150" b="1" kern="0" dirty="0" err="1"/>
               <a:t>stureiko</a:t>
             </a:r>
             <a:r>
-              <a:rPr lang="en-US" sz="1150" b="1" dirty="0"/>
+              <a:rPr lang="en-US" sz="1150" b="1" kern="0" dirty="0"/>
               <a:t> (TG)</a:t>
             </a:r>
-            <a:endParaRPr lang="ru-RU" sz="1150" b="1" dirty="0"/>
           </a:p>
           <a:p>
-            <a:pPr marL="0" marR="0" lvl="0" indent="0" algn="l" rtl="0">
-              <a:lnSpc>
-                <a:spcPct val="100000"/>
-              </a:lnSpc>
-              <a:spcBef>
-                <a:spcPts val="0"/>
-              </a:spcBef>
-              <a:spcAft>
-                <a:spcPts val="0"/>
-              </a:spcAft>
-              <a:buNone/>
-            </a:pPr>
-            <a:endParaRPr lang="ru-RU" sz="1150" b="1" dirty="0"/>
+            <a:pPr rtl="0"/>
+            <a:endParaRPr lang="en-US" sz="1150" b="1" kern="0" dirty="0"/>
           </a:p>
           <a:p>
-            <a:pPr marL="0" marR="0" lvl="0" indent="0" algn="l" rtl="0">
-              <a:lnSpc>
-                <a:spcPct val="100000"/>
-              </a:lnSpc>
-              <a:spcBef>
-                <a:spcPts val="0"/>
-              </a:spcBef>
-              <a:spcAft>
-                <a:spcPts val="0"/>
-              </a:spcAft>
-              <a:buNone/>
-            </a:pPr>
+            <a:pPr rtl="0"/>
             <a:r>
-              <a:rPr lang="en-US" sz="1150" b="1" dirty="0"/>
+              <a:rPr lang="en-US" sz="1150" b="1" kern="0" dirty="0"/>
               <a:t>LinkedIn: </a:t>
             </a:r>
             <a:r>
-              <a:rPr lang="en-US" sz="1150" dirty="0">
+              <a:rPr lang="en-US" sz="1150" kern="0" dirty="0">
                 <a:hlinkClick r:id="rId4"/>
               </a:rPr>
               <a:t>igor-stureiko</a:t>
             </a:r>
             <a:r>
-              <a:rPr lang="en-US" sz="1150" dirty="0"/>
+              <a:rPr lang="en-US" sz="1150" kern="0" dirty="0"/>
               <a:t> </a:t>
             </a:r>
-            <a:endParaRPr sz="1400" dirty="0"/>
+          </a:p>
+          <a:p>
+            <a:pPr rtl="0"/>
+            <a:endParaRPr lang="en-US" sz="1150" kern="0" dirty="0"/>
+          </a:p>
+          <a:p>
+            <a:pPr rtl="0"/>
+            <a:r>
+              <a:rPr lang="en-US" sz="1150" b="1" kern="0" dirty="0"/>
+              <a:t>@</a:t>
+            </a:r>
+            <a:r>
+              <a:rPr lang="en-US" sz="1150" b="1" kern="0" dirty="0" err="1"/>
+              <a:t>rl_fintech</a:t>
+            </a:r>
+            <a:r>
+              <a:rPr lang="en-US" sz="1150" b="1" kern="0" dirty="0"/>
+              <a:t> </a:t>
+            </a:r>
+            <a:r>
+              <a:rPr lang="en-US" sz="1150" kern="0" dirty="0"/>
+              <a:t>(</a:t>
+            </a:r>
+            <a:r>
+              <a:rPr lang="ru-RU" sz="1150" kern="0" dirty="0"/>
+              <a:t>Мой канал о моделях в бизнесе)</a:t>
+            </a:r>
+            <a:endParaRPr lang="ru-RU" sz="1400" kern="0" dirty="0"/>
           </a:p>
         </p:txBody>
       </p:sp>
@@ -28237,8 +28464,8 @@
         </p:nvSpPr>
         <p:spPr>
           <a:xfrm>
-            <a:off x="1654524" y="2049300"/>
-            <a:ext cx="2917475" cy="877133"/>
+            <a:off x="1654525" y="2192440"/>
+            <a:ext cx="2917475" cy="646300"/>
           </a:xfrm>
           <a:prstGeom prst="rect">
             <a:avLst/>
@@ -28336,43 +28563,6 @@
               <a:t>в учебной группе </a:t>
             </a:r>
             <a:endParaRPr lang="en-US" sz="1500" b="0" i="0" u="none" strike="noStrike" cap="none" dirty="0">
-              <a:solidFill>
-                <a:srgbClr val="000000"/>
-              </a:solidFill>
-              <a:latin typeface="Roboto"/>
-              <a:ea typeface="Roboto"/>
-              <a:cs typeface="Roboto"/>
-              <a:sym typeface="Roboto"/>
-            </a:endParaRPr>
-          </a:p>
-          <a:p>
-            <a:pPr marL="0" marR="0" lvl="0" indent="0" algn="l" rtl="0">
-              <a:lnSpc>
-                <a:spcPct val="100000"/>
-              </a:lnSpc>
-              <a:spcBef>
-                <a:spcPts val="0"/>
-              </a:spcBef>
-              <a:spcAft>
-                <a:spcPts val="0"/>
-              </a:spcAft>
-              <a:buClr>
-                <a:srgbClr val="000000"/>
-              </a:buClr>
-              <a:buSzPts val="1500"/>
-              <a:buFont typeface="Arial"/>
-              <a:buNone/>
-            </a:pPr>
-            <a:r>
-              <a:rPr lang="en-US" sz="1500" b="1" dirty="0">
-                <a:latin typeface="Roboto"/>
-                <a:ea typeface="Roboto"/>
-                <a:cs typeface="Roboto"/>
-                <a:sym typeface="Roboto"/>
-              </a:rPr>
-              <a:t># OTUS ML Ops-2023-11</a:t>
-            </a:r>
-            <a:endParaRPr sz="1500" b="1" i="0" u="none" strike="noStrike" cap="none" dirty="0">
               <a:solidFill>
                 <a:srgbClr val="000000"/>
               </a:solidFill>
@@ -29973,62 +30163,6 @@
       </p:grpSpPr>
       <p:sp>
         <p:nvSpPr>
-          <p:cNvPr id="29" name="Google Shape;271;p44">
-            <a:extLst>
-              <a:ext uri="{FF2B5EF4-FFF2-40B4-BE49-F238E27FC236}">
-                <a16:creationId xmlns:a16="http://schemas.microsoft.com/office/drawing/2014/main" id="{97290346-692E-064C-8312-9A26736D095B}"/>
-              </a:ext>
-            </a:extLst>
-          </p:cNvPr>
-          <p:cNvSpPr/>
-          <p:nvPr/>
-        </p:nvSpPr>
-        <p:spPr>
-          <a:xfrm>
-            <a:off x="2226713" y="3660132"/>
-            <a:ext cx="5355965" cy="396000"/>
-          </a:xfrm>
-          <a:prstGeom prst="roundRect">
-            <a:avLst>
-              <a:gd name="adj" fmla="val 16667"/>
-            </a:avLst>
-          </a:prstGeom>
-          <a:solidFill>
-            <a:srgbClr val="FFD966"/>
-          </a:solidFill>
-          <a:ln>
-            <a:noFill/>
-          </a:ln>
-          <a:effectLst/>
-        </p:spPr>
-        <p:txBody>
-          <a:bodyPr spcFirstLastPara="1" wrap="square" lIns="162000" tIns="91425" rIns="162000" bIns="91425" anchor="ctr" anchorCtr="0">
-            <a:noAutofit/>
-          </a:bodyPr>
-          <a:lstStyle/>
-          <a:p>
-            <a:r>
-              <a:rPr lang="ru-RU" sz="1200" dirty="0">
-                <a:solidFill>
-                  <a:srgbClr val="1F1F1F"/>
-                </a:solidFill>
-                <a:latin typeface="Google Sans"/>
-                <a:sym typeface="Roboto"/>
-              </a:rPr>
-              <a:t>Разбор ДЗ</a:t>
-            </a:r>
-            <a:endParaRPr sz="1200" dirty="0">
-              <a:solidFill>
-                <a:srgbClr val="1F1F1F"/>
-              </a:solidFill>
-              <a:latin typeface="Google Sans"/>
-              <a:sym typeface="Roboto"/>
-            </a:endParaRPr>
-          </a:p>
-        </p:txBody>
-      </p:sp>
-      <p:sp>
-        <p:nvSpPr>
           <p:cNvPr id="270" name="Google Shape;270;p44"/>
           <p:cNvSpPr txBox="1">
             <a:spLocks noGrp="1"/>
@@ -30223,7 +30357,7 @@
         </p:nvSpPr>
         <p:spPr>
           <a:xfrm>
-            <a:off x="2226713" y="2615406"/>
+            <a:off x="2226713" y="2789527"/>
             <a:ext cx="5355965" cy="396000"/>
           </a:xfrm>
           <a:prstGeom prst="roundRect">
@@ -30312,7 +30446,7 @@
         </p:nvSpPr>
         <p:spPr>
           <a:xfrm>
-            <a:off x="2226713" y="3137769"/>
+            <a:off x="2226713" y="3486011"/>
             <a:ext cx="5355965" cy="396000"/>
           </a:xfrm>
           <a:prstGeom prst="roundRect">
@@ -30473,8 +30607,8 @@
         </p:nvCxnSpPr>
         <p:spPr>
           <a:xfrm rot="16200000" flipH="1">
-            <a:off x="1451905" y="2038597"/>
-            <a:ext cx="1129687" cy="419929"/>
+            <a:off x="1364844" y="2125658"/>
+            <a:ext cx="1303808" cy="419929"/>
           </a:xfrm>
           <a:prstGeom prst="bentConnector2">
             <a:avLst/>
@@ -30518,8 +30652,8 @@
         </p:nvCxnSpPr>
         <p:spPr>
           <a:xfrm rot="16200000" flipH="1">
-            <a:off x="1190723" y="2299779"/>
-            <a:ext cx="1652050" cy="419929"/>
+            <a:off x="1016602" y="2473900"/>
+            <a:ext cx="2000292" cy="419929"/>
           </a:xfrm>
           <a:prstGeom prst="bentConnector2">
             <a:avLst/>
@@ -30795,345 +30929,6 @@
       </p:graphicFrame>
       <p:pic>
         <p:nvPicPr>
-          <p:cNvPr id="34" name="Google Shape;225;p40">
-            <a:extLst>
-              <a:ext uri="{FF2B5EF4-FFF2-40B4-BE49-F238E27FC236}">
-                <a16:creationId xmlns:a16="http://schemas.microsoft.com/office/drawing/2014/main" id="{B01DA89D-798E-854C-BF8E-15096ED7EB62}"/>
-              </a:ext>
-            </a:extLst>
-          </p:cNvPr>
-          <p:cNvPicPr preferRelativeResize="0"/>
-          <p:nvPr/>
-        </p:nvPicPr>
-        <p:blipFill>
-          <a:blip r:embed="rId3"/>
-          <a:srcRect t="10511" b="10511"/>
-          <a:stretch/>
-        </p:blipFill>
-        <p:spPr>
-          <a:xfrm>
-            <a:off x="683041" y="2024387"/>
-            <a:ext cx="419930" cy="396001"/>
-          </a:xfrm>
-          <a:prstGeom prst="ellipse">
-            <a:avLst/>
-          </a:prstGeom>
-          <a:noFill/>
-          <a:ln>
-            <a:noFill/>
-          </a:ln>
-        </p:spPr>
-      </p:pic>
-      <p:pic>
-        <p:nvPicPr>
-          <p:cNvPr id="35" name="Google Shape;225;p40">
-            <a:extLst>
-              <a:ext uri="{FF2B5EF4-FFF2-40B4-BE49-F238E27FC236}">
-                <a16:creationId xmlns:a16="http://schemas.microsoft.com/office/drawing/2014/main" id="{D02DB568-53FD-254F-9422-1CE939A88CE5}"/>
-              </a:ext>
-            </a:extLst>
-          </p:cNvPr>
-          <p:cNvPicPr preferRelativeResize="0"/>
-          <p:nvPr/>
-        </p:nvPicPr>
-        <p:blipFill>
-          <a:blip r:embed="rId3"/>
-          <a:srcRect t="10511" b="10511"/>
-          <a:stretch/>
-        </p:blipFill>
-        <p:spPr>
-          <a:xfrm>
-            <a:off x="683041" y="3084429"/>
-            <a:ext cx="419930" cy="396001"/>
-          </a:xfrm>
-          <a:prstGeom prst="ellipse">
-            <a:avLst/>
-          </a:prstGeom>
-          <a:noFill/>
-          <a:ln>
-            <a:noFill/>
-          </a:ln>
-        </p:spPr>
-      </p:pic>
-      <p:pic>
-        <p:nvPicPr>
-          <p:cNvPr id="38" name="Google Shape;234;p40">
-            <a:extLst>
-              <a:ext uri="{FF2B5EF4-FFF2-40B4-BE49-F238E27FC236}">
-                <a16:creationId xmlns:a16="http://schemas.microsoft.com/office/drawing/2014/main" id="{A95012D4-9C1E-1A4E-B05B-DC3498710C55}"/>
-              </a:ext>
-            </a:extLst>
-          </p:cNvPr>
-          <p:cNvPicPr preferRelativeResize="0"/>
-          <p:nvPr/>
-        </p:nvPicPr>
-        <p:blipFill>
-          <a:blip r:embed="rId3"/>
-          <a:srcRect t="10047" b="10047"/>
-          <a:stretch/>
-        </p:blipFill>
-        <p:spPr>
-          <a:xfrm>
-            <a:off x="687921" y="2559554"/>
-            <a:ext cx="415050" cy="396002"/>
-          </a:xfrm>
-          <a:prstGeom prst="ellipse">
-            <a:avLst/>
-          </a:prstGeom>
-          <a:noFill/>
-          <a:ln>
-            <a:noFill/>
-          </a:ln>
-        </p:spPr>
-      </p:pic>
-      <p:pic>
-        <p:nvPicPr>
-          <p:cNvPr id="39" name="Google Shape;231;p40">
-            <a:extLst>
-              <a:ext uri="{FF2B5EF4-FFF2-40B4-BE49-F238E27FC236}">
-                <a16:creationId xmlns:a16="http://schemas.microsoft.com/office/drawing/2014/main" id="{C79E0705-4C11-6D4A-B6B0-568F2D5F94CA}"/>
-              </a:ext>
-            </a:extLst>
-          </p:cNvPr>
-          <p:cNvPicPr preferRelativeResize="0"/>
-          <p:nvPr/>
-        </p:nvPicPr>
-        <p:blipFill>
-          <a:blip r:embed="rId4"/>
-          <a:srcRect t="10494" b="10494"/>
-          <a:stretch/>
-        </p:blipFill>
-        <p:spPr>
-          <a:xfrm>
-            <a:off x="683041" y="4124129"/>
-            <a:ext cx="415050" cy="396002"/>
-          </a:xfrm>
-          <a:prstGeom prst="ellipse">
-            <a:avLst/>
-          </a:prstGeom>
-          <a:noFill/>
-          <a:ln>
-            <a:noFill/>
-          </a:ln>
-        </p:spPr>
-      </p:pic>
-      <p:sp>
-        <p:nvSpPr>
-          <p:cNvPr id="24" name="TextBox 23">
-            <a:extLst>
-              <a:ext uri="{FF2B5EF4-FFF2-40B4-BE49-F238E27FC236}">
-                <a16:creationId xmlns:a16="http://schemas.microsoft.com/office/drawing/2014/main" id="{05D10E68-0ACB-6348-82B0-9441EA33A550}"/>
-              </a:ext>
-            </a:extLst>
-          </p:cNvPr>
-          <p:cNvSpPr txBox="1"/>
-          <p:nvPr/>
-        </p:nvSpPr>
-        <p:spPr>
-          <a:xfrm>
-            <a:off x="1154981" y="2117756"/>
-            <a:ext cx="689612" cy="307777"/>
-          </a:xfrm>
-          <a:prstGeom prst="rect">
-            <a:avLst/>
-          </a:prstGeom>
-          <a:noFill/>
-        </p:spPr>
-        <p:txBody>
-          <a:bodyPr wrap="none" rtlCol="0">
-            <a:spAutoFit/>
-          </a:bodyPr>
-          <a:lstStyle/>
-          <a:p>
-            <a:r>
-              <a:rPr lang="en-US" dirty="0">
-                <a:latin typeface="AkayaTelivigala" pitchFamily="2" charset="77"/>
-                <a:cs typeface="AkayaTelivigala" pitchFamily="2" charset="77"/>
-              </a:rPr>
-              <a:t>23.</a:t>
-            </a:r>
-            <a:r>
-              <a:rPr lang="ru-RU" dirty="0">
-                <a:latin typeface="AkayaTelivigala" pitchFamily="2" charset="77"/>
-                <a:cs typeface="AkayaTelivigala" pitchFamily="2" charset="77"/>
-              </a:rPr>
-              <a:t>0</a:t>
-            </a:r>
-            <a:r>
-              <a:rPr lang="en-US" dirty="0">
-                <a:latin typeface="AkayaTelivigala" pitchFamily="2" charset="77"/>
-                <a:cs typeface="AkayaTelivigala" pitchFamily="2" charset="77"/>
-              </a:rPr>
-              <a:t>4 -</a:t>
-            </a:r>
-          </a:p>
-        </p:txBody>
-      </p:sp>
-      <p:sp>
-        <p:nvSpPr>
-          <p:cNvPr id="41" name="TextBox 40">
-            <a:extLst>
-              <a:ext uri="{FF2B5EF4-FFF2-40B4-BE49-F238E27FC236}">
-                <a16:creationId xmlns:a16="http://schemas.microsoft.com/office/drawing/2014/main" id="{D0A023EE-4138-B744-B9DC-1258510E269A}"/>
-              </a:ext>
-            </a:extLst>
-          </p:cNvPr>
-          <p:cNvSpPr txBox="1"/>
-          <p:nvPr/>
-        </p:nvSpPr>
-        <p:spPr>
-          <a:xfrm>
-            <a:off x="1154981" y="2650066"/>
-            <a:ext cx="689612" cy="307777"/>
-          </a:xfrm>
-          <a:prstGeom prst="rect">
-            <a:avLst/>
-          </a:prstGeom>
-          <a:noFill/>
-        </p:spPr>
-        <p:txBody>
-          <a:bodyPr wrap="none" rtlCol="0">
-            <a:spAutoFit/>
-          </a:bodyPr>
-          <a:lstStyle/>
-          <a:p>
-            <a:r>
-              <a:rPr lang="en-US" dirty="0">
-                <a:latin typeface="AkayaTelivigala" pitchFamily="2" charset="77"/>
-                <a:cs typeface="AkayaTelivigala" pitchFamily="2" charset="77"/>
-              </a:rPr>
-              <a:t>27.</a:t>
-            </a:r>
-            <a:r>
-              <a:rPr lang="ru-RU" dirty="0">
-                <a:latin typeface="AkayaTelivigala" pitchFamily="2" charset="77"/>
-                <a:cs typeface="AkayaTelivigala" pitchFamily="2" charset="77"/>
-              </a:rPr>
-              <a:t>0</a:t>
-            </a:r>
-            <a:r>
-              <a:rPr lang="en-US" dirty="0">
-                <a:latin typeface="AkayaTelivigala" pitchFamily="2" charset="77"/>
-                <a:cs typeface="AkayaTelivigala" pitchFamily="2" charset="77"/>
-              </a:rPr>
-              <a:t>4 -</a:t>
-            </a:r>
-          </a:p>
-        </p:txBody>
-      </p:sp>
-      <p:sp>
-        <p:nvSpPr>
-          <p:cNvPr id="42" name="TextBox 41">
-            <a:extLst>
-              <a:ext uri="{FF2B5EF4-FFF2-40B4-BE49-F238E27FC236}">
-                <a16:creationId xmlns:a16="http://schemas.microsoft.com/office/drawing/2014/main" id="{E43D3746-CD87-3841-9A96-88D1CB270FCA}"/>
-              </a:ext>
-            </a:extLst>
-          </p:cNvPr>
-          <p:cNvSpPr txBox="1"/>
-          <p:nvPr/>
-        </p:nvSpPr>
-        <p:spPr>
-          <a:xfrm>
-            <a:off x="1159189" y="3177798"/>
-            <a:ext cx="699230" cy="307777"/>
-          </a:xfrm>
-          <a:prstGeom prst="rect">
-            <a:avLst/>
-          </a:prstGeom>
-          <a:noFill/>
-        </p:spPr>
-        <p:txBody>
-          <a:bodyPr wrap="none" rtlCol="0">
-            <a:spAutoFit/>
-          </a:bodyPr>
-          <a:lstStyle/>
-          <a:p>
-            <a:r>
-              <a:rPr lang="ru-RU" dirty="0">
-                <a:latin typeface="AkayaTelivigala" pitchFamily="2" charset="77"/>
-                <a:cs typeface="AkayaTelivigala" pitchFamily="2" charset="77"/>
-              </a:rPr>
-              <a:t>0</a:t>
-            </a:r>
-            <a:r>
-              <a:rPr lang="en-US" dirty="0">
-                <a:latin typeface="AkayaTelivigala" pitchFamily="2" charset="77"/>
-                <a:cs typeface="AkayaTelivigala" pitchFamily="2" charset="77"/>
-              </a:rPr>
-              <a:t>2.</a:t>
-            </a:r>
-            <a:r>
-              <a:rPr lang="ru-RU" dirty="0">
-                <a:latin typeface="AkayaTelivigala" pitchFamily="2" charset="77"/>
-                <a:cs typeface="AkayaTelivigala" pitchFamily="2" charset="77"/>
-              </a:rPr>
-              <a:t>0</a:t>
-            </a:r>
-            <a:r>
-              <a:rPr lang="en-US" dirty="0">
-                <a:latin typeface="AkayaTelivigala" pitchFamily="2" charset="77"/>
-                <a:cs typeface="AkayaTelivigala" pitchFamily="2" charset="77"/>
-              </a:rPr>
-              <a:t>5 -</a:t>
-            </a:r>
-          </a:p>
-        </p:txBody>
-      </p:sp>
-      <p:sp>
-        <p:nvSpPr>
-          <p:cNvPr id="43" name="TextBox 42">
-            <a:extLst>
-              <a:ext uri="{FF2B5EF4-FFF2-40B4-BE49-F238E27FC236}">
-                <a16:creationId xmlns:a16="http://schemas.microsoft.com/office/drawing/2014/main" id="{9AD07B95-E4F8-254C-871B-1199DFE83B1E}"/>
-              </a:ext>
-            </a:extLst>
-          </p:cNvPr>
-          <p:cNvSpPr txBox="1"/>
-          <p:nvPr/>
-        </p:nvSpPr>
-        <p:spPr>
-          <a:xfrm>
-            <a:off x="1144691" y="4214640"/>
-            <a:ext cx="689612" cy="307777"/>
-          </a:xfrm>
-          <a:prstGeom prst="rect">
-            <a:avLst/>
-          </a:prstGeom>
-          <a:noFill/>
-        </p:spPr>
-        <p:txBody>
-          <a:bodyPr wrap="none" rtlCol="0">
-            <a:spAutoFit/>
-          </a:bodyPr>
-          <a:lstStyle/>
-          <a:p>
-            <a:r>
-              <a:rPr lang="en-US" dirty="0">
-                <a:latin typeface="AkayaTelivigala" pitchFamily="2" charset="77"/>
-                <a:cs typeface="AkayaTelivigala" pitchFamily="2" charset="77"/>
-              </a:rPr>
-              <a:t>07.</a:t>
-            </a:r>
-            <a:r>
-              <a:rPr lang="ru-RU" dirty="0">
-                <a:latin typeface="AkayaTelivigala" pitchFamily="2" charset="77"/>
-                <a:cs typeface="AkayaTelivigala" pitchFamily="2" charset="77"/>
-              </a:rPr>
-              <a:t>0</a:t>
-            </a:r>
-            <a:r>
-              <a:rPr lang="en-US" dirty="0">
-                <a:latin typeface="AkayaTelivigala" pitchFamily="2" charset="77"/>
-                <a:cs typeface="AkayaTelivigala" pitchFamily="2" charset="77"/>
-              </a:rPr>
-              <a:t>5 -</a:t>
-            </a:r>
-          </a:p>
-        </p:txBody>
-      </p:sp>
-      <p:pic>
-        <p:nvPicPr>
           <p:cNvPr id="31" name="Google Shape;530;p82">
             <a:extLst>
               <a:ext uri="{FF2B5EF4-FFF2-40B4-BE49-F238E27FC236}">
@@ -31147,7 +30942,7 @@
           <p:nvPr/>
         </p:nvPicPr>
         <p:blipFill rotWithShape="1">
-          <a:blip r:embed="rId5">
+          <a:blip r:embed="rId3">
             <a:alphaModFix/>
             <a:duotone>
               <a:schemeClr val="accent5">
@@ -31213,288 +31008,6 @@
               <a:latin typeface="Apple Chancery" panose="03020702040506060504" pitchFamily="66" charset="-79"/>
               <a:cs typeface="Apple Chancery" panose="03020702040506060504" pitchFamily="66" charset="-79"/>
             </a:endParaRPr>
-          </a:p>
-        </p:txBody>
-      </p:sp>
-      <p:pic>
-        <p:nvPicPr>
-          <p:cNvPr id="33" name="Google Shape;225;p40">
-            <a:extLst>
-              <a:ext uri="{FF2B5EF4-FFF2-40B4-BE49-F238E27FC236}">
-                <a16:creationId xmlns:a16="http://schemas.microsoft.com/office/drawing/2014/main" id="{4B31EA49-DC7D-3F43-B6B4-82B3DA66C984}"/>
-              </a:ext>
-            </a:extLst>
-          </p:cNvPr>
-          <p:cNvPicPr preferRelativeResize="0"/>
-          <p:nvPr/>
-        </p:nvPicPr>
-        <p:blipFill>
-          <a:blip r:embed="rId6"/>
-          <a:srcRect t="6408" b="6408"/>
-          <a:stretch/>
-        </p:blipFill>
-        <p:spPr>
-          <a:xfrm>
-            <a:off x="4297654" y="1192794"/>
-            <a:ext cx="419930" cy="396001"/>
-          </a:xfrm>
-          <a:prstGeom prst="ellipse">
-            <a:avLst/>
-          </a:prstGeom>
-          <a:noFill/>
-          <a:ln>
-            <a:noFill/>
-          </a:ln>
-        </p:spPr>
-      </p:pic>
-      <p:sp>
-        <p:nvSpPr>
-          <p:cNvPr id="2" name="TextBox 1">
-            <a:extLst>
-              <a:ext uri="{FF2B5EF4-FFF2-40B4-BE49-F238E27FC236}">
-                <a16:creationId xmlns:a16="http://schemas.microsoft.com/office/drawing/2014/main" id="{ED73155C-8D9E-FA46-B8F0-4066C48C83CF}"/>
-              </a:ext>
-            </a:extLst>
-          </p:cNvPr>
-          <p:cNvSpPr txBox="1"/>
-          <p:nvPr/>
-        </p:nvSpPr>
-        <p:spPr>
-          <a:xfrm>
-            <a:off x="4717584" y="1127417"/>
-            <a:ext cx="963725" cy="523220"/>
-          </a:xfrm>
-          <a:prstGeom prst="rect">
-            <a:avLst/>
-          </a:prstGeom>
-          <a:noFill/>
-        </p:spPr>
-        <p:txBody>
-          <a:bodyPr wrap="none" rtlCol="0">
-            <a:spAutoFit/>
-          </a:bodyPr>
-          <a:lstStyle/>
-          <a:p>
-            <a:r>
-              <a:rPr lang="ru-RU" dirty="0"/>
-              <a:t>Игорь</a:t>
-            </a:r>
-            <a:br>
-              <a:rPr lang="ru-RU" dirty="0"/>
-            </a:br>
-            <a:r>
-              <a:rPr lang="ru-RU" dirty="0"/>
-              <a:t>Стурейко</a:t>
-            </a:r>
-            <a:endParaRPr lang="en-US" dirty="0"/>
-          </a:p>
-        </p:txBody>
-      </p:sp>
-      <p:pic>
-        <p:nvPicPr>
-          <p:cNvPr id="25" name="Google Shape;231;p40">
-            <a:extLst>
-              <a:ext uri="{FF2B5EF4-FFF2-40B4-BE49-F238E27FC236}">
-                <a16:creationId xmlns:a16="http://schemas.microsoft.com/office/drawing/2014/main" id="{E76A625E-3AAF-0449-8CB1-BF347E75A486}"/>
-              </a:ext>
-            </a:extLst>
-          </p:cNvPr>
-          <p:cNvPicPr preferRelativeResize="0"/>
-          <p:nvPr/>
-        </p:nvPicPr>
-        <p:blipFill>
-          <a:blip r:embed="rId4"/>
-          <a:srcRect t="10494" b="10494"/>
-          <a:stretch/>
-        </p:blipFill>
-        <p:spPr>
-          <a:xfrm>
-            <a:off x="5893714" y="1192794"/>
-            <a:ext cx="415050" cy="396002"/>
-          </a:xfrm>
-          <a:prstGeom prst="ellipse">
-            <a:avLst/>
-          </a:prstGeom>
-          <a:noFill/>
-          <a:ln>
-            <a:noFill/>
-          </a:ln>
-        </p:spPr>
-      </p:pic>
-      <p:sp>
-        <p:nvSpPr>
-          <p:cNvPr id="26" name="TextBox 25">
-            <a:extLst>
-              <a:ext uri="{FF2B5EF4-FFF2-40B4-BE49-F238E27FC236}">
-                <a16:creationId xmlns:a16="http://schemas.microsoft.com/office/drawing/2014/main" id="{9EF20C2D-DB3B-4542-AC72-5ED1297EB6DD}"/>
-              </a:ext>
-            </a:extLst>
-          </p:cNvPr>
-          <p:cNvSpPr txBox="1"/>
-          <p:nvPr/>
-        </p:nvSpPr>
-        <p:spPr>
-          <a:xfrm>
-            <a:off x="6387504" y="1121794"/>
-            <a:ext cx="898003" cy="523220"/>
-          </a:xfrm>
-          <a:prstGeom prst="rect">
-            <a:avLst/>
-          </a:prstGeom>
-          <a:noFill/>
-        </p:spPr>
-        <p:txBody>
-          <a:bodyPr wrap="none" rtlCol="0">
-            <a:spAutoFit/>
-          </a:bodyPr>
-          <a:lstStyle/>
-          <a:p>
-            <a:r>
-              <a:rPr lang="ru-RU" dirty="0"/>
-              <a:t>Николай</a:t>
-            </a:r>
-            <a:br>
-              <a:rPr lang="ru-RU" dirty="0"/>
-            </a:br>
-            <a:r>
-              <a:rPr lang="ru-RU" dirty="0"/>
-              <a:t>Осипов</a:t>
-            </a:r>
-            <a:endParaRPr lang="en-US" dirty="0"/>
-          </a:p>
-        </p:txBody>
-      </p:sp>
-      <p:cxnSp>
-        <p:nvCxnSpPr>
-          <p:cNvPr id="30" name="Elbow Connector 29">
-            <a:extLst>
-              <a:ext uri="{FF2B5EF4-FFF2-40B4-BE49-F238E27FC236}">
-                <a16:creationId xmlns:a16="http://schemas.microsoft.com/office/drawing/2014/main" id="{71928F25-2C26-E840-9F20-E19ED35181CF}"/>
-              </a:ext>
-            </a:extLst>
-          </p:cNvPr>
-          <p:cNvCxnSpPr>
-            <a:endCxn id="29" idx="1"/>
-          </p:cNvCxnSpPr>
-          <p:nvPr/>
-        </p:nvCxnSpPr>
-        <p:spPr>
-          <a:xfrm rot="16200000" flipH="1">
-            <a:off x="1184344" y="2815763"/>
-            <a:ext cx="1664808" cy="419930"/>
-          </a:xfrm>
-          <a:prstGeom prst="bentConnector2">
-            <a:avLst/>
-          </a:prstGeom>
-          <a:ln>
-            <a:solidFill>
-              <a:schemeClr val="tx1"/>
-            </a:solidFill>
-            <a:tailEnd type="triangle"/>
-          </a:ln>
-        </p:spPr>
-        <p:style>
-          <a:lnRef idx="1">
-            <a:schemeClr val="accent1"/>
-          </a:lnRef>
-          <a:fillRef idx="0">
-            <a:schemeClr val="accent1"/>
-          </a:fillRef>
-          <a:effectRef idx="0">
-            <a:schemeClr val="accent1"/>
-          </a:effectRef>
-          <a:fontRef idx="minor">
-            <a:schemeClr val="tx1"/>
-          </a:fontRef>
-        </p:style>
-      </p:cxnSp>
-      <p:pic>
-        <p:nvPicPr>
-          <p:cNvPr id="36" name="Google Shape;225;p40">
-            <a:extLst>
-              <a:ext uri="{FF2B5EF4-FFF2-40B4-BE49-F238E27FC236}">
-                <a16:creationId xmlns:a16="http://schemas.microsoft.com/office/drawing/2014/main" id="{E341C731-0B4F-C84C-AE42-03B844744711}"/>
-              </a:ext>
-            </a:extLst>
-          </p:cNvPr>
-          <p:cNvPicPr preferRelativeResize="0"/>
-          <p:nvPr/>
-        </p:nvPicPr>
-        <p:blipFill>
-          <a:blip r:embed="rId3"/>
-          <a:srcRect t="10511" b="10511"/>
-          <a:stretch/>
-        </p:blipFill>
-        <p:spPr>
-          <a:xfrm>
-            <a:off x="683041" y="3594034"/>
-            <a:ext cx="419930" cy="396001"/>
-          </a:xfrm>
-          <a:prstGeom prst="ellipse">
-            <a:avLst/>
-          </a:prstGeom>
-          <a:noFill/>
-          <a:ln>
-            <a:noFill/>
-          </a:ln>
-        </p:spPr>
-      </p:pic>
-      <p:sp>
-        <p:nvSpPr>
-          <p:cNvPr id="37" name="TextBox 36">
-            <a:extLst>
-              <a:ext uri="{FF2B5EF4-FFF2-40B4-BE49-F238E27FC236}">
-                <a16:creationId xmlns:a16="http://schemas.microsoft.com/office/drawing/2014/main" id="{37366420-8556-4B48-B5BE-90FC05422A20}"/>
-              </a:ext>
-            </a:extLst>
-          </p:cNvPr>
-          <p:cNvSpPr txBox="1"/>
-          <p:nvPr/>
-        </p:nvSpPr>
-        <p:spPr>
-          <a:xfrm>
-            <a:off x="1159189" y="3687403"/>
-            <a:ext cx="699230" cy="307777"/>
-          </a:xfrm>
-          <a:prstGeom prst="rect">
-            <a:avLst/>
-          </a:prstGeom>
-          <a:noFill/>
-        </p:spPr>
-        <p:txBody>
-          <a:bodyPr wrap="none" rtlCol="0">
-            <a:spAutoFit/>
-          </a:bodyPr>
-          <a:lstStyle/>
-          <a:p>
-            <a:r>
-              <a:rPr lang="ru-RU" dirty="0">
-                <a:latin typeface="AkayaTelivigala" pitchFamily="2" charset="77"/>
-                <a:cs typeface="AkayaTelivigala" pitchFamily="2" charset="77"/>
-              </a:rPr>
-              <a:t>0</a:t>
-            </a:r>
-            <a:r>
-              <a:rPr lang="en-US" dirty="0">
-                <a:latin typeface="AkayaTelivigala" pitchFamily="2" charset="77"/>
-                <a:cs typeface="AkayaTelivigala" pitchFamily="2" charset="77"/>
-              </a:rPr>
-              <a:t>3.</a:t>
-            </a:r>
-            <a:r>
-              <a:rPr lang="ru-RU" dirty="0">
-                <a:latin typeface="AkayaTelivigala" pitchFamily="2" charset="77"/>
-                <a:cs typeface="AkayaTelivigala" pitchFamily="2" charset="77"/>
-              </a:rPr>
-              <a:t>0</a:t>
-            </a:r>
-            <a:r>
-              <a:rPr lang="en-US" dirty="0">
-                <a:latin typeface="AkayaTelivigala" pitchFamily="2" charset="77"/>
-                <a:cs typeface="AkayaTelivigala" pitchFamily="2" charset="77"/>
-              </a:rPr>
-              <a:t>5 -</a:t>
-            </a:r>
           </a:p>
         </p:txBody>
       </p:sp>
